--- a/assets/pptx/catalog-153.pptx
+++ b/assets/pptx/catalog-153.pptx
@@ -3550,7 +3550,7 @@
                 <a:ea typeface="Ebrima"/>
                 <a:cs typeface="Ebrima"/>
               </a:rPr>
-              <a:t>ዘመኔ ይለቅ እቤትህ (2x)</a:t>
+              <a:t>ዘመኔ ይለቅ እቤትህ 2x</a:t>
             </a:r>
           </a:p>
         </p:txBody>
@@ -4088,7 +4088,7 @@
                 <a:ea typeface="Ebrima"/>
                 <a:cs typeface="Ebrima"/>
               </a:rPr>
-              <a:t>የተወደደ ጥበብ የሞላው (2x)</a:t>
+              <a:t>የተወደደ ጥበብ የሞላው 2x</a:t>
             </a:r>
           </a:p>
           <a:p>
@@ -4384,7 +4384,7 @@
                 <a:ea typeface="Ebrima"/>
                 <a:cs typeface="Ebrima"/>
               </a:rPr>
-              <a:t>ሰውረኝ ከዓይን አምሮቴ (2x)</a:t>
+              <a:t>ሰውረኝ ከዓይን አምሮቴ 2x</a:t>
             </a:r>
           </a:p>
         </p:txBody>
@@ -4832,7 +4832,7 @@
                 <a:ea typeface="Ebrima"/>
                 <a:cs typeface="Ebrima"/>
               </a:rPr>
-              <a:t>ሰውረኝ ከዓይን አምሮቴ (2x)</a:t>
+              <a:t>ሰውረኝ ከዓይን አምሮቴ 2x</a:t>
             </a:r>
           </a:p>
         </p:txBody>
